--- a/Contrato-Pedagogico-Portfolio-PAC-VIII.pptx
+++ b/Contrato-Pedagogico-Portfolio-PAC-VIII.pptx
@@ -7862,7 +7862,7 @@
                 <a:spcPts val="0"/>
               </a:spcBef>
               <a:spcAft>
-                <a:spcPts val="1600"/>
+                <a:spcPts val="800"/>
               </a:spcAft>
             </a:pPr>
             <a:r>
@@ -7894,7 +7894,73 @@
                 </a:solidFill>
                 <a:latin typeface="Arial"/>
               </a:rPr>
-              <a:t>Até esta data o trabalho deve estar entregue e ter sido aprovado na prova de autoria.</a:t>
+              <a:t>Trabalho entregue e aprovado na prova de autoria.</a:t>
+            </a:r>
+          </a:p>
+          <a:p>
+            <a:pPr algn="l">
+              <a:lnSpc>
+                <a:spcPct val="115000"/>
+              </a:lnSpc>
+              <a:spcBef>
+                <a:spcPts val="0"/>
+              </a:spcBef>
+              <a:spcAft>
+                <a:spcPts val="800"/>
+              </a:spcAft>
+            </a:pPr>
+            <a:r>
+              <a:rPr sz="1200" b="1" i="0">
+                <a:solidFill>
+                  <a:srgbClr val="E8A33D"/>
+                </a:solidFill>
+                <a:latin typeface="Arial"/>
+              </a:rPr>
+              <a:t>SEGUNDA TENTATIVA DA PROVA DE AUTORIA</a:t>
+            </a:r>
+          </a:p>
+          <a:p>
+            <a:pPr algn="l">
+              <a:lnSpc>
+                <a:spcPct val="115000"/>
+              </a:lnSpc>
+              <a:spcBef>
+                <a:spcPts val="0"/>
+              </a:spcBef>
+              <a:spcAft>
+                <a:spcPts val="600"/>
+              </a:spcAft>
+            </a:pPr>
+            <a:r>
+              <a:rPr sz="1500" b="0" i="0">
+                <a:solidFill>
+                  <a:srgbClr val="C5D0DA"/>
+                </a:solidFill>
+                <a:latin typeface="Arial"/>
+              </a:rPr>
+              <a:t>03/12/2026 · quinta-feira</a:t>
+            </a:r>
+          </a:p>
+          <a:p>
+            <a:pPr algn="l">
+              <a:lnSpc>
+                <a:spcPct val="115000"/>
+              </a:lnSpc>
+              <a:spcBef>
+                <a:spcPts val="0"/>
+              </a:spcBef>
+              <a:spcAft>
+                <a:spcPts val="0"/>
+              </a:spcAft>
+            </a:pPr>
+            <a:r>
+              <a:rPr sz="1400" b="0" i="0">
+                <a:solidFill>
+                  <a:srgbClr val="FFFFFF"/>
+                </a:solidFill>
+                <a:latin typeface="Arial"/>
+              </a:rPr>
+              <a:t>Reprovando de novo: não apresenta e reprova na disciplina.</a:t>
             </a:r>
           </a:p>
         </p:txBody>
@@ -10022,7 +10088,7 @@
                 </a:solidFill>
                 <a:latin typeface="Arial"/>
               </a:rPr>
-              <a:t>Autoria é condição de existência do trabalho, não critério de nota. A prova de autoria é obrigatória.</a:t>
+              <a:t>Autoria é condição de existência do trabalho. A prova de autoria admite uma segunda tentativa; reprovar duas vezes reprova na disciplina.</a:t>
             </a:r>
           </a:p>
         </p:txBody>
@@ -10587,7 +10653,7 @@
         </p:nvSpPr>
         <p:spPr>
           <a:xfrm>
-            <a:off x="868680" y="3042412"/>
+            <a:off x="868680" y="3031236"/>
             <a:ext cx="100584" cy="100584"/>
           </a:xfrm>
           <a:prstGeom prst="ellipse">
@@ -10631,7 +10697,7 @@
         </p:nvSpPr>
         <p:spPr>
           <a:xfrm>
-            <a:off x="1143000" y="2960116"/>
+            <a:off x="1143000" y="2948940"/>
             <a:ext cx="4572000" cy="365760"/>
           </a:xfrm>
           <a:prstGeom prst="rect">
@@ -10663,7 +10729,7 @@
                 </a:solidFill>
                 <a:latin typeface="Arial"/>
               </a:rPr>
-              <a:t>Participar das quatro orientações e evidenciá-las</a:t>
+              <a:t>Participar das cinco orientações e evidenciá-las</a:t>
             </a:r>
           </a:p>
         </p:txBody>
@@ -10676,7 +10742,7 @@
         </p:nvSpPr>
         <p:spPr>
           <a:xfrm>
-            <a:off x="868680" y="3460496"/>
+            <a:off x="868680" y="3438144"/>
             <a:ext cx="100584" cy="100584"/>
           </a:xfrm>
           <a:prstGeom prst="ellipse">
@@ -10720,7 +10786,7 @@
         </p:nvSpPr>
         <p:spPr>
           <a:xfrm>
-            <a:off x="1143000" y="3378200"/>
+            <a:off x="1143000" y="3355848"/>
             <a:ext cx="4572000" cy="365760"/>
           </a:xfrm>
           <a:prstGeom prst="rect">
@@ -10765,7 +10831,7 @@
         </p:nvSpPr>
         <p:spPr>
           <a:xfrm>
-            <a:off x="868680" y="3878580"/>
+            <a:off x="868680" y="3845052"/>
             <a:ext cx="100584" cy="100584"/>
           </a:xfrm>
           <a:prstGeom prst="ellipse">
@@ -10809,7 +10875,7 @@
         </p:nvSpPr>
         <p:spPr>
           <a:xfrm>
-            <a:off x="1143000" y="3796284"/>
+            <a:off x="1143000" y="3762756"/>
             <a:ext cx="4572000" cy="365760"/>
           </a:xfrm>
           <a:prstGeom prst="rect">
@@ -10854,7 +10920,7 @@
         </p:nvSpPr>
         <p:spPr>
           <a:xfrm>
-            <a:off x="868680" y="4296664"/>
+            <a:off x="868680" y="4251960"/>
             <a:ext cx="100584" cy="100584"/>
           </a:xfrm>
           <a:prstGeom prst="ellipse">
@@ -10898,7 +10964,7 @@
         </p:nvSpPr>
         <p:spPr>
           <a:xfrm>
-            <a:off x="1143000" y="4214368"/>
+            <a:off x="1143000" y="4169664"/>
             <a:ext cx="4572000" cy="365760"/>
           </a:xfrm>
           <a:prstGeom prst="rect">
@@ -10943,7 +11009,7 @@
         </p:nvSpPr>
         <p:spPr>
           <a:xfrm>
-            <a:off x="868680" y="4714748"/>
+            <a:off x="868680" y="4658868"/>
             <a:ext cx="100584" cy="100584"/>
           </a:xfrm>
           <a:prstGeom prst="ellipse">
@@ -10987,7 +11053,7 @@
         </p:nvSpPr>
         <p:spPr>
           <a:xfrm>
-            <a:off x="1143000" y="4632452"/>
+            <a:off x="1143000" y="4576572"/>
             <a:ext cx="4572000" cy="365760"/>
           </a:xfrm>
           <a:prstGeom prst="rect">
@@ -11254,7 +11320,7 @@
         </p:nvSpPr>
         <p:spPr>
           <a:xfrm>
-            <a:off x="6537960" y="3042412"/>
+            <a:off x="6537960" y="3031236"/>
             <a:ext cx="100584" cy="100584"/>
           </a:xfrm>
           <a:prstGeom prst="ellipse">
@@ -11298,7 +11364,7 @@
         </p:nvSpPr>
         <p:spPr>
           <a:xfrm>
-            <a:off x="6812280" y="2960116"/>
+            <a:off x="6812280" y="2948940"/>
             <a:ext cx="4572000" cy="365760"/>
           </a:xfrm>
           <a:prstGeom prst="rect">
@@ -11330,7 +11396,7 @@
                 </a:solidFill>
                 <a:latin typeface="Arial"/>
               </a:rPr>
-              <a:t>Oferecer as quatro orientações e responder em tempo hábil</a:t>
+              <a:t>Oferecer as cinco orientações e responder em tempo hábil</a:t>
             </a:r>
           </a:p>
         </p:txBody>
@@ -11343,7 +11409,7 @@
         </p:nvSpPr>
         <p:spPr>
           <a:xfrm>
-            <a:off x="6537960" y="3460496"/>
+            <a:off x="6537960" y="3438144"/>
             <a:ext cx="100584" cy="100584"/>
           </a:xfrm>
           <a:prstGeom prst="ellipse">
@@ -11387,7 +11453,7 @@
         </p:nvSpPr>
         <p:spPr>
           <a:xfrm>
-            <a:off x="6812280" y="3378200"/>
+            <a:off x="6812280" y="3355848"/>
             <a:ext cx="4572000" cy="365760"/>
           </a:xfrm>
           <a:prstGeom prst="rect">
@@ -11432,7 +11498,7 @@
         </p:nvSpPr>
         <p:spPr>
           <a:xfrm>
-            <a:off x="6537960" y="3878580"/>
+            <a:off x="6537960" y="3845052"/>
             <a:ext cx="100584" cy="100584"/>
           </a:xfrm>
           <a:prstGeom prst="ellipse">
@@ -11476,7 +11542,7 @@
         </p:nvSpPr>
         <p:spPr>
           <a:xfrm>
-            <a:off x="6812280" y="3796284"/>
+            <a:off x="6812280" y="3762756"/>
             <a:ext cx="4572000" cy="365760"/>
           </a:xfrm>
           <a:prstGeom prst="rect">
@@ -11521,7 +11587,7 @@
         </p:nvSpPr>
         <p:spPr>
           <a:xfrm>
-            <a:off x="6537960" y="4296664"/>
+            <a:off x="6537960" y="4251960"/>
             <a:ext cx="100584" cy="100584"/>
           </a:xfrm>
           <a:prstGeom prst="ellipse">
@@ -11565,7 +11631,7 @@
         </p:nvSpPr>
         <p:spPr>
           <a:xfrm>
-            <a:off x="6812280" y="4214368"/>
+            <a:off x="6812280" y="4169664"/>
             <a:ext cx="4572000" cy="365760"/>
           </a:xfrm>
           <a:prstGeom prst="rect">
@@ -11610,7 +11676,7 @@
         </p:nvSpPr>
         <p:spPr>
           <a:xfrm>
-            <a:off x="6537960" y="4714748"/>
+            <a:off x="6537960" y="4658868"/>
             <a:ext cx="100584" cy="100584"/>
           </a:xfrm>
           <a:prstGeom prst="ellipse">
@@ -11654,7 +11720,7 @@
         </p:nvSpPr>
         <p:spPr>
           <a:xfrm>
-            <a:off x="6812280" y="4632452"/>
+            <a:off x="6812280" y="4576572"/>
             <a:ext cx="4572000" cy="365760"/>
           </a:xfrm>
           <a:prstGeom prst="rect">
@@ -11777,6 +11843,184 @@
                 <a:latin typeface="Arial"/>
               </a:rPr>
               <a:t>14</a:t>
+            </a:r>
+          </a:p>
+        </p:txBody>
+      </p:sp>
+      <p:sp>
+        <p:nvSpPr>
+          <p:cNvPr id="20" name="Oval 19"/>
+          <p:cNvSpPr/>
+          <p:nvPr/>
+        </p:nvSpPr>
+        <p:spPr>
+          <a:xfrm>
+            <a:off x="868680" y="5065776"/>
+            <a:ext cx="100584" cy="100584"/>
+          </a:xfrm>
+          <a:prstGeom prst="ellipse">
+            <a:avLst/>
+          </a:prstGeom>
+          <a:solidFill>
+            <a:srgbClr val="10243E"/>
+          </a:solidFill>
+          <a:ln>
+            <a:noFill/>
+          </a:ln>
+          <a:effectLst/>
+        </p:spPr>
+        <p:style>
+          <a:lnRef idx="1">
+            <a:schemeClr val="accent1"/>
+          </a:lnRef>
+          <a:fillRef idx="3">
+            <a:schemeClr val="accent1"/>
+          </a:fillRef>
+          <a:effectRef idx="2">
+            <a:schemeClr val="accent1"/>
+          </a:effectRef>
+          <a:fontRef idx="minor">
+            <a:schemeClr val="lt1"/>
+          </a:fontRef>
+        </p:style>
+        <p:txBody>
+          <a:bodyPr rtlCol="0" anchor="ctr"/>
+          <a:lstStyle/>
+          <a:p>
+            <a:pPr algn="ctr"/>
+          </a:p>
+        </p:txBody>
+      </p:sp>
+      <p:sp>
+        <p:nvSpPr>
+          <p:cNvPr id="21" name="TextBox 20"/>
+          <p:cNvSpPr txBox="1"/>
+          <p:nvPr/>
+        </p:nvSpPr>
+        <p:spPr>
+          <a:xfrm>
+            <a:off x="1143000" y="4983480"/>
+            <a:ext cx="4572000" cy="365760"/>
+          </a:xfrm>
+          <a:prstGeom prst="rect">
+            <a:avLst/>
+          </a:prstGeom>
+          <a:noFill/>
+        </p:spPr>
+        <p:txBody>
+          <a:bodyPr wrap="square" anchor="t" lIns="0" rIns="0" tIns="0" bIns="0">
+            <a:spAutoFit/>
+          </a:bodyPr>
+          <a:lstStyle/>
+          <a:p>
+            <a:pPr algn="l">
+              <a:lnSpc>
+                <a:spcPct val="115000"/>
+              </a:lnSpc>
+              <a:spcBef>
+                <a:spcPts val="0"/>
+              </a:spcBef>
+              <a:spcAft>
+                <a:spcPts val="0"/>
+              </a:spcAft>
+            </a:pPr>
+            <a:r>
+              <a:rPr sz="1300" b="0" i="0">
+                <a:solidFill>
+                  <a:srgbClr val="1A1A1A"/>
+                </a:solidFill>
+                <a:latin typeface="Arial"/>
+              </a:rPr>
+              <a:t>Visitar uma noite do evento e avaliar os trabalhos dos colegas</a:t>
+            </a:r>
+          </a:p>
+        </p:txBody>
+      </p:sp>
+      <p:sp>
+        <p:nvSpPr>
+          <p:cNvPr id="35" name="Oval 34"/>
+          <p:cNvSpPr/>
+          <p:nvPr/>
+        </p:nvSpPr>
+        <p:spPr>
+          <a:xfrm>
+            <a:off x="6537960" y="5065776"/>
+            <a:ext cx="100584" cy="100584"/>
+          </a:xfrm>
+          <a:prstGeom prst="ellipse">
+            <a:avLst/>
+          </a:prstGeom>
+          <a:solidFill>
+            <a:srgbClr val="1F7A8C"/>
+          </a:solidFill>
+          <a:ln>
+            <a:noFill/>
+          </a:ln>
+          <a:effectLst/>
+        </p:spPr>
+        <p:style>
+          <a:lnRef idx="1">
+            <a:schemeClr val="accent1"/>
+          </a:lnRef>
+          <a:fillRef idx="3">
+            <a:schemeClr val="accent1"/>
+          </a:fillRef>
+          <a:effectRef idx="2">
+            <a:schemeClr val="accent1"/>
+          </a:effectRef>
+          <a:fontRef idx="minor">
+            <a:schemeClr val="lt1"/>
+          </a:fontRef>
+        </p:style>
+        <p:txBody>
+          <a:bodyPr rtlCol="0" anchor="ctr"/>
+          <a:lstStyle/>
+          <a:p>
+            <a:pPr algn="ctr"/>
+          </a:p>
+        </p:txBody>
+      </p:sp>
+      <p:sp>
+        <p:nvSpPr>
+          <p:cNvPr id="36" name="TextBox 35"/>
+          <p:cNvSpPr txBox="1"/>
+          <p:nvPr/>
+        </p:nvSpPr>
+        <p:spPr>
+          <a:xfrm>
+            <a:off x="6812280" y="4983480"/>
+            <a:ext cx="4572000" cy="365760"/>
+          </a:xfrm>
+          <a:prstGeom prst="rect">
+            <a:avLst/>
+          </a:prstGeom>
+          <a:noFill/>
+        </p:spPr>
+        <p:txBody>
+          <a:bodyPr wrap="square" anchor="t" lIns="0" rIns="0" tIns="0" bIns="0">
+            <a:spAutoFit/>
+          </a:bodyPr>
+          <a:lstStyle/>
+          <a:p>
+            <a:pPr algn="l">
+              <a:lnSpc>
+                <a:spcPct val="115000"/>
+              </a:lnSpc>
+              <a:spcBef>
+                <a:spcPts val="0"/>
+              </a:spcBef>
+              <a:spcAft>
+                <a:spcPts val="0"/>
+              </a:spcAft>
+            </a:pPr>
+            <a:r>
+              <a:rPr sz="1300" b="0" i="0">
+                <a:solidFill>
+                  <a:srgbClr val="1A1A1A"/>
+                </a:solidFill>
+                <a:latin typeface="Arial"/>
+              </a:rPr>
+              <a:t>Aplicar a segunda tentativa da prova de autoria até 03/12</a:t>
             </a:r>
           </a:p>
         </p:txBody>
@@ -17209,7 +17453,7 @@
                 </a:solidFill>
                 <a:latin typeface="Arial"/>
               </a:rPr>
-              <a:t>Quatro orientações</a:t>
+              <a:t>Cinco orientações</a:t>
             </a:r>
           </a:p>
           <a:p>
@@ -17231,7 +17475,7 @@
                 </a:solidFill>
                 <a:latin typeface="Arial"/>
               </a:rPr>
-              <a:t>Presenciais ou remotas, com evidência do aluno (ata por e-mail, foto, registro).</a:t>
+              <a:t>Presenciais ou remotas, com evidência sua (ata por e-mail, foto, registro). Duas delas até 30/09/2026.</a:t>
             </a:r>
           </a:p>
         </p:txBody>
@@ -19401,7 +19645,7 @@
                 </a:solidFill>
                 <a:latin typeface="Arial"/>
               </a:rPr>
-              <a:t>•  Planejamento das sprints</a:t>
+              <a:t>•  Planejamento das iterações de entrega</a:t>
             </a:r>
           </a:p>
           <a:p>
